--- a/files/week2/korean/Wk2_L7_slides.pptx
+++ b/files/week2/korean/Wk2_L7_slides.pptx
@@ -266,7 +266,7 @@
           <a:p>
             <a:fld id="{A34E029D-4975-9049-A4B2-065531108780}" type="datetimeFigureOut">
               <a:rPr lang="en-US" smtClean="0"/>
-              <a:t>7/14/2026</a:t>
+              <a:t>7/18/2026</a:t>
             </a:fld>
             <a:endParaRPr lang="en-US"/>
           </a:p>
@@ -3732,7 +3732,7 @@
           <a:p>
             <a:fld id="{66FF1AA2-E424-AF48-BE0B-AA2CA13DBDC8}" type="datetimeFigureOut">
               <a:rPr lang="en-US" smtClean="0"/>
-              <a:t>7/14/2026</a:t>
+              <a:t>7/18/2026</a:t>
             </a:fld>
             <a:endParaRPr lang="en-US"/>
           </a:p>
@@ -4142,6 +4142,54 @@
           </a:p>
         </p:txBody>
       </p:sp>
+      <p:sp>
+        <p:nvSpPr>
+          <p:cNvPr id="3" name="AutoPageNum">
+            <a:extLst>
+              <a:ext uri="{FF2B5EF4-FFF2-40B4-BE49-F238E27FC236}">
+                <a16:creationId xmlns:a16="http://schemas.microsoft.com/office/drawing/2014/main" id="{9FCAC204-F891-7C55-630A-5B8D48DCC7B6}"/>
+              </a:ext>
+            </a:extLst>
+          </p:cNvPr>
+          <p:cNvSpPr txBox="1"/>
+          <p:nvPr/>
+        </p:nvSpPr>
+        <p:spPr>
+          <a:xfrm>
+            <a:off x="11633200" y="6451600"/>
+            <a:ext cx="508000" cy="304800"/>
+          </a:xfrm>
+          <a:prstGeom prst="rect">
+            <a:avLst/>
+          </a:prstGeom>
+          <a:noFill/>
+        </p:spPr>
+        <p:txBody>
+          <a:bodyPr vert="horz" wrap="square" lIns="0" tIns="0" rIns="0" bIns="0" rtlCol="0">
+            <a:noAutofit/>
+          </a:bodyPr>
+          <a:lstStyle/>
+          <a:p>
+            <a:pPr algn="ctr"/>
+            <a:fld id="{76031BA9-A756-413D-8F61-E3B71A70C564}" type="slidenum">
+              <a:rPr lang="en-US" sz="1400" smtClean="0">
+                <a:solidFill>
+                  <a:srgbClr val="FFFFFF"/>
+                </a:solidFill>
+                <a:latin typeface="Arial" panose="020B0604020202020204" pitchFamily="34" charset="0"/>
+              </a:rPr>
+              <a:pPr algn="ctr"/>
+              <a:t>1</a:t>
+            </a:fld>
+            <a:endParaRPr lang="en-US" sz="1400">
+              <a:solidFill>
+                <a:srgbClr val="FFFFFF"/>
+              </a:solidFill>
+              <a:latin typeface="Arial" panose="020B0604020202020204" pitchFamily="34" charset="0"/>
+            </a:endParaRPr>
+          </a:p>
+        </p:txBody>
+      </p:sp>
     </p:spTree>
     <p:extLst>
       <p:ext uri="{BB962C8B-B14F-4D97-AF65-F5344CB8AC3E}">
@@ -4210,6 +4258,54 @@
               <a:rPr lang="en-US" dirty="0"/>
               <a:t>Revenue Recognition - Cases</a:t>
             </a:r>
+          </a:p>
+        </p:txBody>
+      </p:sp>
+      <p:sp>
+        <p:nvSpPr>
+          <p:cNvPr id="3" name="AutoPageNum">
+            <a:extLst>
+              <a:ext uri="{FF2B5EF4-FFF2-40B4-BE49-F238E27FC236}">
+                <a16:creationId xmlns:a16="http://schemas.microsoft.com/office/drawing/2014/main" id="{1983EA37-FA9D-C14A-C21C-0B3F45328012}"/>
+              </a:ext>
+            </a:extLst>
+          </p:cNvPr>
+          <p:cNvSpPr txBox="1"/>
+          <p:nvPr/>
+        </p:nvSpPr>
+        <p:spPr>
+          <a:xfrm>
+            <a:off x="11633200" y="6451600"/>
+            <a:ext cx="508000" cy="304800"/>
+          </a:xfrm>
+          <a:prstGeom prst="rect">
+            <a:avLst/>
+          </a:prstGeom>
+          <a:noFill/>
+        </p:spPr>
+        <p:txBody>
+          <a:bodyPr vert="horz" wrap="square" lIns="0" tIns="0" rIns="0" bIns="0" rtlCol="0">
+            <a:noAutofit/>
+          </a:bodyPr>
+          <a:lstStyle/>
+          <a:p>
+            <a:pPr algn="ctr"/>
+            <a:fld id="{9DCBE263-59C0-40A8-90C8-D374715BFDDA}" type="slidenum">
+              <a:rPr lang="en-US" sz="1400" smtClean="0">
+                <a:solidFill>
+                  <a:srgbClr val="000000"/>
+                </a:solidFill>
+                <a:latin typeface="Arial" panose="020B0604020202020204" pitchFamily="34" charset="0"/>
+              </a:rPr>
+              <a:pPr algn="ctr"/>
+              <a:t>10</a:t>
+            </a:fld>
+            <a:endParaRPr lang="en-US" sz="1400">
+              <a:solidFill>
+                <a:srgbClr val="000000"/>
+              </a:solidFill>
+              <a:latin typeface="Arial" panose="020B0604020202020204" pitchFamily="34" charset="0"/>
+            </a:endParaRPr>
           </a:p>
         </p:txBody>
       </p:sp>
@@ -5428,6 +5524,54 @@
           </a:p>
         </p:txBody>
       </p:sp>
+      <p:sp>
+        <p:nvSpPr>
+          <p:cNvPr id="4" name="AutoPageNum">
+            <a:extLst>
+              <a:ext uri="{FF2B5EF4-FFF2-40B4-BE49-F238E27FC236}">
+                <a16:creationId xmlns:a16="http://schemas.microsoft.com/office/drawing/2014/main" id="{B7E909C7-15CD-B842-4E3A-64C720147592}"/>
+              </a:ext>
+            </a:extLst>
+          </p:cNvPr>
+          <p:cNvSpPr txBox="1"/>
+          <p:nvPr/>
+        </p:nvSpPr>
+        <p:spPr>
+          <a:xfrm>
+            <a:off x="11633200" y="6451600"/>
+            <a:ext cx="508000" cy="304800"/>
+          </a:xfrm>
+          <a:prstGeom prst="rect">
+            <a:avLst/>
+          </a:prstGeom>
+          <a:noFill/>
+        </p:spPr>
+        <p:txBody>
+          <a:bodyPr vert="horz" wrap="square" lIns="0" tIns="0" rIns="0" bIns="0" rtlCol="0">
+            <a:noAutofit/>
+          </a:bodyPr>
+          <a:lstStyle/>
+          <a:p>
+            <a:pPr algn="ctr"/>
+            <a:fld id="{681D8440-F1C2-4E92-85C5-6CAEC97555E4}" type="slidenum">
+              <a:rPr lang="en-US" sz="1400" smtClean="0">
+                <a:solidFill>
+                  <a:srgbClr val="FFFFFF"/>
+                </a:solidFill>
+                <a:latin typeface="Arial" panose="020B0604020202020204" pitchFamily="34" charset="0"/>
+              </a:rPr>
+              <a:pPr algn="ctr"/>
+              <a:t>11</a:t>
+            </a:fld>
+            <a:endParaRPr lang="en-US" sz="1400">
+              <a:solidFill>
+                <a:srgbClr val="FFFFFF"/>
+              </a:solidFill>
+              <a:latin typeface="Arial" panose="020B0604020202020204" pitchFamily="34" charset="0"/>
+            </a:endParaRPr>
+          </a:p>
+        </p:txBody>
+      </p:sp>
     </p:spTree>
     <p:extLst>
       <p:ext uri="{BB962C8B-B14F-4D97-AF65-F5344CB8AC3E}">
@@ -6569,6 +6713,54 @@
           </a:p>
         </p:txBody>
       </p:sp>
+      <p:sp>
+        <p:nvSpPr>
+          <p:cNvPr id="6" name="AutoPageNum">
+            <a:extLst>
+              <a:ext uri="{FF2B5EF4-FFF2-40B4-BE49-F238E27FC236}">
+                <a16:creationId xmlns:a16="http://schemas.microsoft.com/office/drawing/2014/main" id="{8A403C46-4EB9-1295-155F-AF7A721493EB}"/>
+              </a:ext>
+            </a:extLst>
+          </p:cNvPr>
+          <p:cNvSpPr txBox="1"/>
+          <p:nvPr/>
+        </p:nvSpPr>
+        <p:spPr>
+          <a:xfrm>
+            <a:off x="11633200" y="6451600"/>
+            <a:ext cx="508000" cy="304800"/>
+          </a:xfrm>
+          <a:prstGeom prst="rect">
+            <a:avLst/>
+          </a:prstGeom>
+          <a:noFill/>
+        </p:spPr>
+        <p:txBody>
+          <a:bodyPr vert="horz" wrap="square" lIns="0" tIns="0" rIns="0" bIns="0" rtlCol="0">
+            <a:noAutofit/>
+          </a:bodyPr>
+          <a:lstStyle/>
+          <a:p>
+            <a:pPr algn="ctr"/>
+            <a:fld id="{9D786EE7-84B5-4D37-881F-B338D8D46DB9}" type="slidenum">
+              <a:rPr lang="en-US" sz="1400" smtClean="0">
+                <a:solidFill>
+                  <a:srgbClr val="FFFFFF"/>
+                </a:solidFill>
+                <a:latin typeface="Arial" panose="020B0604020202020204" pitchFamily="34" charset="0"/>
+              </a:rPr>
+              <a:pPr algn="ctr"/>
+              <a:t>12</a:t>
+            </a:fld>
+            <a:endParaRPr lang="en-US" sz="1400">
+              <a:solidFill>
+                <a:srgbClr val="FFFFFF"/>
+              </a:solidFill>
+              <a:latin typeface="Arial" panose="020B0604020202020204" pitchFamily="34" charset="0"/>
+            </a:endParaRPr>
+          </a:p>
+        </p:txBody>
+      </p:sp>
     </p:spTree>
     <p:extLst>
       <p:ext uri="{BB962C8B-B14F-4D97-AF65-F5344CB8AC3E}">
@@ -7754,6 +7946,54 @@
           </a:p>
         </p:txBody>
       </p:sp>
+      <p:sp>
+        <p:nvSpPr>
+          <p:cNvPr id="11" name="AutoPageNum">
+            <a:extLst>
+              <a:ext uri="{FF2B5EF4-FFF2-40B4-BE49-F238E27FC236}">
+                <a16:creationId xmlns:a16="http://schemas.microsoft.com/office/drawing/2014/main" id="{3189B187-B562-052C-4DA0-9286BA8BFFC5}"/>
+              </a:ext>
+            </a:extLst>
+          </p:cNvPr>
+          <p:cNvSpPr txBox="1"/>
+          <p:nvPr/>
+        </p:nvSpPr>
+        <p:spPr>
+          <a:xfrm>
+            <a:off x="11633200" y="6451600"/>
+            <a:ext cx="508000" cy="304800"/>
+          </a:xfrm>
+          <a:prstGeom prst="rect">
+            <a:avLst/>
+          </a:prstGeom>
+          <a:noFill/>
+        </p:spPr>
+        <p:txBody>
+          <a:bodyPr vert="horz" wrap="square" lIns="0" tIns="0" rIns="0" bIns="0" rtlCol="0">
+            <a:noAutofit/>
+          </a:bodyPr>
+          <a:lstStyle/>
+          <a:p>
+            <a:pPr algn="ctr"/>
+            <a:fld id="{FFD4C807-C511-4981-92E8-EC67D13C1D7E}" type="slidenum">
+              <a:rPr lang="en-US" sz="1400" smtClean="0">
+                <a:solidFill>
+                  <a:srgbClr val="FFFFFF"/>
+                </a:solidFill>
+                <a:latin typeface="Arial" panose="020B0604020202020204" pitchFamily="34" charset="0"/>
+              </a:rPr>
+              <a:pPr algn="ctr"/>
+              <a:t>13</a:t>
+            </a:fld>
+            <a:endParaRPr lang="en-US" sz="1400">
+              <a:solidFill>
+                <a:srgbClr val="FFFFFF"/>
+              </a:solidFill>
+              <a:latin typeface="Arial" panose="020B0604020202020204" pitchFamily="34" charset="0"/>
+            </a:endParaRPr>
+          </a:p>
+        </p:txBody>
+      </p:sp>
     </p:spTree>
     <p:extLst>
       <p:ext uri="{BB962C8B-B14F-4D97-AF65-F5344CB8AC3E}">
@@ -8855,6 +9095,54 @@
           </a:p>
         </p:txBody>
       </p:sp>
+      <p:sp>
+        <p:nvSpPr>
+          <p:cNvPr id="11" name="AutoPageNum">
+            <a:extLst>
+              <a:ext uri="{FF2B5EF4-FFF2-40B4-BE49-F238E27FC236}">
+                <a16:creationId xmlns:a16="http://schemas.microsoft.com/office/drawing/2014/main" id="{4DFC93CF-48B5-9CA4-2443-1889A731AD90}"/>
+              </a:ext>
+            </a:extLst>
+          </p:cNvPr>
+          <p:cNvSpPr txBox="1"/>
+          <p:nvPr/>
+        </p:nvSpPr>
+        <p:spPr>
+          <a:xfrm>
+            <a:off x="11633200" y="6451600"/>
+            <a:ext cx="508000" cy="304800"/>
+          </a:xfrm>
+          <a:prstGeom prst="rect">
+            <a:avLst/>
+          </a:prstGeom>
+          <a:noFill/>
+        </p:spPr>
+        <p:txBody>
+          <a:bodyPr vert="horz" wrap="square" lIns="0" tIns="0" rIns="0" bIns="0" rtlCol="0">
+            <a:noAutofit/>
+          </a:bodyPr>
+          <a:lstStyle/>
+          <a:p>
+            <a:pPr algn="ctr"/>
+            <a:fld id="{8709F182-8400-4A59-A1A1-3806CB257BBC}" type="slidenum">
+              <a:rPr lang="en-US" sz="1400" smtClean="0">
+                <a:solidFill>
+                  <a:srgbClr val="FFFFFF"/>
+                </a:solidFill>
+                <a:latin typeface="Arial" panose="020B0604020202020204" pitchFamily="34" charset="0"/>
+              </a:rPr>
+              <a:pPr algn="ctr"/>
+              <a:t>14</a:t>
+            </a:fld>
+            <a:endParaRPr lang="en-US" sz="1400">
+              <a:solidFill>
+                <a:srgbClr val="FFFFFF"/>
+              </a:solidFill>
+              <a:latin typeface="Arial" panose="020B0604020202020204" pitchFamily="34" charset="0"/>
+            </a:endParaRPr>
+          </a:p>
+        </p:txBody>
+      </p:sp>
     </p:spTree>
     <p:extLst>
       <p:ext uri="{BB962C8B-B14F-4D97-AF65-F5344CB8AC3E}">
@@ -10060,6 +10348,54 @@
           </a:p>
         </p:txBody>
       </p:sp>
+      <p:sp>
+        <p:nvSpPr>
+          <p:cNvPr id="11" name="AutoPageNum">
+            <a:extLst>
+              <a:ext uri="{FF2B5EF4-FFF2-40B4-BE49-F238E27FC236}">
+                <a16:creationId xmlns:a16="http://schemas.microsoft.com/office/drawing/2014/main" id="{252306D0-8A06-5814-0224-DE66C70FC2A8}"/>
+              </a:ext>
+            </a:extLst>
+          </p:cNvPr>
+          <p:cNvSpPr txBox="1"/>
+          <p:nvPr/>
+        </p:nvSpPr>
+        <p:spPr>
+          <a:xfrm>
+            <a:off x="11633200" y="6451600"/>
+            <a:ext cx="508000" cy="304800"/>
+          </a:xfrm>
+          <a:prstGeom prst="rect">
+            <a:avLst/>
+          </a:prstGeom>
+          <a:noFill/>
+        </p:spPr>
+        <p:txBody>
+          <a:bodyPr vert="horz" wrap="square" lIns="0" tIns="0" rIns="0" bIns="0" rtlCol="0">
+            <a:noAutofit/>
+          </a:bodyPr>
+          <a:lstStyle/>
+          <a:p>
+            <a:pPr algn="ctr"/>
+            <a:fld id="{D67E03C6-BB38-476E-B7D4-0A551CC9F38D}" type="slidenum">
+              <a:rPr lang="en-US" sz="1400" smtClean="0">
+                <a:solidFill>
+                  <a:srgbClr val="FFFFFF"/>
+                </a:solidFill>
+                <a:latin typeface="Arial" panose="020B0604020202020204" pitchFamily="34" charset="0"/>
+              </a:rPr>
+              <a:pPr algn="ctr"/>
+              <a:t>15</a:t>
+            </a:fld>
+            <a:endParaRPr lang="en-US" sz="1400">
+              <a:solidFill>
+                <a:srgbClr val="FFFFFF"/>
+              </a:solidFill>
+              <a:latin typeface="Arial" panose="020B0604020202020204" pitchFamily="34" charset="0"/>
+            </a:endParaRPr>
+          </a:p>
+        </p:txBody>
+      </p:sp>
     </p:spTree>
     <p:extLst>
       <p:ext uri="{BB962C8B-B14F-4D97-AF65-F5344CB8AC3E}">
@@ -10131,6 +10467,54 @@
           </a:p>
         </p:txBody>
       </p:sp>
+      <p:sp>
+        <p:nvSpPr>
+          <p:cNvPr id="3" name="AutoPageNum">
+            <a:extLst>
+              <a:ext uri="{FF2B5EF4-FFF2-40B4-BE49-F238E27FC236}">
+                <a16:creationId xmlns:a16="http://schemas.microsoft.com/office/drawing/2014/main" id="{80D918D5-39BE-EBB8-F151-26C3425CBA4F}"/>
+              </a:ext>
+            </a:extLst>
+          </p:cNvPr>
+          <p:cNvSpPr txBox="1"/>
+          <p:nvPr/>
+        </p:nvSpPr>
+        <p:spPr>
+          <a:xfrm>
+            <a:off x="11633200" y="6451600"/>
+            <a:ext cx="508000" cy="304800"/>
+          </a:xfrm>
+          <a:prstGeom prst="rect">
+            <a:avLst/>
+          </a:prstGeom>
+          <a:noFill/>
+        </p:spPr>
+        <p:txBody>
+          <a:bodyPr vert="horz" wrap="square" lIns="0" tIns="0" rIns="0" bIns="0" rtlCol="0">
+            <a:noAutofit/>
+          </a:bodyPr>
+          <a:lstStyle/>
+          <a:p>
+            <a:pPr algn="ctr"/>
+            <a:fld id="{B776E913-F22D-418C-A168-26C9BF9F33DE}" type="slidenum">
+              <a:rPr lang="en-US" sz="1400" smtClean="0">
+                <a:solidFill>
+                  <a:srgbClr val="000000"/>
+                </a:solidFill>
+                <a:latin typeface="Arial" panose="020B0604020202020204" pitchFamily="34" charset="0"/>
+              </a:rPr>
+              <a:pPr algn="ctr"/>
+              <a:t>16</a:t>
+            </a:fld>
+            <a:endParaRPr lang="en-US" sz="1400">
+              <a:solidFill>
+                <a:srgbClr val="000000"/>
+              </a:solidFill>
+              <a:latin typeface="Arial" panose="020B0604020202020204" pitchFamily="34" charset="0"/>
+            </a:endParaRPr>
+          </a:p>
+        </p:txBody>
+      </p:sp>
     </p:spTree>
     <p:extLst>
       <p:ext uri="{BB962C8B-B14F-4D97-AF65-F5344CB8AC3E}">
@@ -10735,6 +11119,54 @@
           </a:fontRef>
         </p:style>
       </p:cxnSp>
+      <p:sp>
+        <p:nvSpPr>
+          <p:cNvPr id="4" name="AutoPageNum">
+            <a:extLst>
+              <a:ext uri="{FF2B5EF4-FFF2-40B4-BE49-F238E27FC236}">
+                <a16:creationId xmlns:a16="http://schemas.microsoft.com/office/drawing/2014/main" id="{803D5325-1265-CAA6-8C81-9E50B8E85226}"/>
+              </a:ext>
+            </a:extLst>
+          </p:cNvPr>
+          <p:cNvSpPr txBox="1"/>
+          <p:nvPr/>
+        </p:nvSpPr>
+        <p:spPr>
+          <a:xfrm>
+            <a:off x="11633200" y="6451600"/>
+            <a:ext cx="508000" cy="304800"/>
+          </a:xfrm>
+          <a:prstGeom prst="rect">
+            <a:avLst/>
+          </a:prstGeom>
+          <a:noFill/>
+        </p:spPr>
+        <p:txBody>
+          <a:bodyPr vert="horz" wrap="square" lIns="0" tIns="0" rIns="0" bIns="0" rtlCol="0">
+            <a:noAutofit/>
+          </a:bodyPr>
+          <a:lstStyle/>
+          <a:p>
+            <a:pPr algn="ctr"/>
+            <a:fld id="{6B58C808-9590-4894-A557-68C9A4B9CFA4}" type="slidenum">
+              <a:rPr lang="en-US" sz="1400" smtClean="0">
+                <a:solidFill>
+                  <a:srgbClr val="FFFFFF"/>
+                </a:solidFill>
+                <a:latin typeface="Arial" panose="020B0604020202020204" pitchFamily="34" charset="0"/>
+              </a:rPr>
+              <a:pPr algn="ctr"/>
+              <a:t>17</a:t>
+            </a:fld>
+            <a:endParaRPr lang="en-US" sz="1400">
+              <a:solidFill>
+                <a:srgbClr val="FFFFFF"/>
+              </a:solidFill>
+              <a:latin typeface="Arial" panose="020B0604020202020204" pitchFamily="34" charset="0"/>
+            </a:endParaRPr>
+          </a:p>
+        </p:txBody>
+      </p:sp>
     </p:spTree>
     <p:extLst>
       <p:ext uri="{BB962C8B-B14F-4D97-AF65-F5344CB8AC3E}">
@@ -11348,6 +11780,54 @@
               </a:tabLst>
             </a:pPr>
             <a:endParaRPr lang="en-US" sz="2000" dirty="0"/>
+          </a:p>
+        </p:txBody>
+      </p:sp>
+      <p:sp>
+        <p:nvSpPr>
+          <p:cNvPr id="4" name="AutoPageNum">
+            <a:extLst>
+              <a:ext uri="{FF2B5EF4-FFF2-40B4-BE49-F238E27FC236}">
+                <a16:creationId xmlns:a16="http://schemas.microsoft.com/office/drawing/2014/main" id="{69D030B8-9712-0838-6931-E44CC4038899}"/>
+              </a:ext>
+            </a:extLst>
+          </p:cNvPr>
+          <p:cNvSpPr txBox="1"/>
+          <p:nvPr/>
+        </p:nvSpPr>
+        <p:spPr>
+          <a:xfrm>
+            <a:off x="11633200" y="6451600"/>
+            <a:ext cx="508000" cy="304800"/>
+          </a:xfrm>
+          <a:prstGeom prst="rect">
+            <a:avLst/>
+          </a:prstGeom>
+          <a:noFill/>
+        </p:spPr>
+        <p:txBody>
+          <a:bodyPr vert="horz" wrap="square" lIns="0" tIns="0" rIns="0" bIns="0" rtlCol="0">
+            <a:noAutofit/>
+          </a:bodyPr>
+          <a:lstStyle/>
+          <a:p>
+            <a:pPr algn="ctr"/>
+            <a:fld id="{F777E271-2BB4-42E3-A280-A363BDE416B4}" type="slidenum">
+              <a:rPr lang="en-US" sz="1400" smtClean="0">
+                <a:solidFill>
+                  <a:srgbClr val="FFFFFF"/>
+                </a:solidFill>
+                <a:latin typeface="Arial" panose="020B0604020202020204" pitchFamily="34" charset="0"/>
+              </a:rPr>
+              <a:pPr algn="ctr"/>
+              <a:t>18</a:t>
+            </a:fld>
+            <a:endParaRPr lang="en-US" sz="1400">
+              <a:solidFill>
+                <a:srgbClr val="FFFFFF"/>
+              </a:solidFill>
+              <a:latin typeface="Arial" panose="020B0604020202020204" pitchFamily="34" charset="0"/>
+            </a:endParaRPr>
           </a:p>
         </p:txBody>
       </p:sp>
@@ -13019,6 +13499,54 @@
           </a:graphicData>
         </a:graphic>
       </p:graphicFrame>
+      <p:sp>
+        <p:nvSpPr>
+          <p:cNvPr id="8" name="AutoPageNum">
+            <a:extLst>
+              <a:ext uri="{FF2B5EF4-FFF2-40B4-BE49-F238E27FC236}">
+                <a16:creationId xmlns:a16="http://schemas.microsoft.com/office/drawing/2014/main" id="{9B32F540-8543-6074-95C9-526C6E3C20D0}"/>
+              </a:ext>
+            </a:extLst>
+          </p:cNvPr>
+          <p:cNvSpPr txBox="1"/>
+          <p:nvPr/>
+        </p:nvSpPr>
+        <p:spPr>
+          <a:xfrm>
+            <a:off x="11633200" y="6451600"/>
+            <a:ext cx="508000" cy="304800"/>
+          </a:xfrm>
+          <a:prstGeom prst="rect">
+            <a:avLst/>
+          </a:prstGeom>
+          <a:noFill/>
+        </p:spPr>
+        <p:txBody>
+          <a:bodyPr vert="horz" wrap="square" lIns="0" tIns="0" rIns="0" bIns="0" rtlCol="0">
+            <a:noAutofit/>
+          </a:bodyPr>
+          <a:lstStyle/>
+          <a:p>
+            <a:pPr algn="ctr"/>
+            <a:fld id="{8A5A3725-D134-4977-8569-9EE4D774708B}" type="slidenum">
+              <a:rPr lang="en-US" sz="1400" smtClean="0">
+                <a:solidFill>
+                  <a:srgbClr val="FFFFFF"/>
+                </a:solidFill>
+                <a:latin typeface="Arial" panose="020B0604020202020204" pitchFamily="34" charset="0"/>
+              </a:rPr>
+              <a:pPr algn="ctr"/>
+              <a:t>19</a:t>
+            </a:fld>
+            <a:endParaRPr lang="en-US" sz="1400">
+              <a:solidFill>
+                <a:srgbClr val="FFFFFF"/>
+              </a:solidFill>
+              <a:latin typeface="Arial" panose="020B0604020202020204" pitchFamily="34" charset="0"/>
+            </a:endParaRPr>
+          </a:p>
+        </p:txBody>
+      </p:sp>
     </p:spTree>
     <p:extLst>
       <p:ext uri="{BB962C8B-B14F-4D97-AF65-F5344CB8AC3E}">
@@ -14009,6 +14537,54 @@
               <a:t>Cost Recovery (원가회수기준)</a:t>
             </a:r>
             <a:endParaRPr lang="en-US" sz="1400" dirty="0"/>
+          </a:p>
+        </p:txBody>
+      </p:sp>
+      <p:sp>
+        <p:nvSpPr>
+          <p:cNvPr id="4" name="AutoPageNum">
+            <a:extLst>
+              <a:ext uri="{FF2B5EF4-FFF2-40B4-BE49-F238E27FC236}">
+                <a16:creationId xmlns:a16="http://schemas.microsoft.com/office/drawing/2014/main" id="{94D3F4D9-B661-FDBE-3B0F-95E4558728D2}"/>
+              </a:ext>
+            </a:extLst>
+          </p:cNvPr>
+          <p:cNvSpPr txBox="1"/>
+          <p:nvPr/>
+        </p:nvSpPr>
+        <p:spPr>
+          <a:xfrm>
+            <a:off x="11633200" y="6451600"/>
+            <a:ext cx="508000" cy="304800"/>
+          </a:xfrm>
+          <a:prstGeom prst="rect">
+            <a:avLst/>
+          </a:prstGeom>
+          <a:noFill/>
+        </p:spPr>
+        <p:txBody>
+          <a:bodyPr vert="horz" wrap="square" lIns="0" tIns="0" rIns="0" bIns="0" rtlCol="0">
+            <a:noAutofit/>
+          </a:bodyPr>
+          <a:lstStyle/>
+          <a:p>
+            <a:pPr algn="ctr"/>
+            <a:fld id="{975C2700-B954-4CDC-BDE8-72621B2C0E99}" type="slidenum">
+              <a:rPr lang="en-US" sz="1400" smtClean="0">
+                <a:solidFill>
+                  <a:srgbClr val="FFFFFF"/>
+                </a:solidFill>
+                <a:latin typeface="Arial" panose="020B0604020202020204" pitchFamily="34" charset="0"/>
+              </a:rPr>
+              <a:pPr algn="ctr"/>
+              <a:t>2</a:t>
+            </a:fld>
+            <a:endParaRPr lang="en-US" sz="1400">
+              <a:solidFill>
+                <a:srgbClr val="FFFFFF"/>
+              </a:solidFill>
+              <a:latin typeface="Arial" panose="020B0604020202020204" pitchFamily="34" charset="0"/>
+            </a:endParaRPr>
           </a:p>
         </p:txBody>
       </p:sp>
@@ -18846,6 +19422,54 @@
           <a:p>
             <a:pPr algn="ctr"/>
             <a:endParaRPr lang="en-US"/>
+          </a:p>
+        </p:txBody>
+      </p:sp>
+      <p:sp>
+        <p:nvSpPr>
+          <p:cNvPr id="3" name="AutoPageNum">
+            <a:extLst>
+              <a:ext uri="{FF2B5EF4-FFF2-40B4-BE49-F238E27FC236}">
+                <a16:creationId xmlns:a16="http://schemas.microsoft.com/office/drawing/2014/main" id="{A1C83D0E-9035-7A4C-8E05-1671874A7C0D}"/>
+              </a:ext>
+            </a:extLst>
+          </p:cNvPr>
+          <p:cNvSpPr txBox="1"/>
+          <p:nvPr/>
+        </p:nvSpPr>
+        <p:spPr>
+          <a:xfrm>
+            <a:off x="11633200" y="6451600"/>
+            <a:ext cx="508000" cy="304800"/>
+          </a:xfrm>
+          <a:prstGeom prst="rect">
+            <a:avLst/>
+          </a:prstGeom>
+          <a:noFill/>
+        </p:spPr>
+        <p:txBody>
+          <a:bodyPr vert="horz" wrap="square" lIns="0" tIns="0" rIns="0" bIns="0" rtlCol="0">
+            <a:noAutofit/>
+          </a:bodyPr>
+          <a:lstStyle/>
+          <a:p>
+            <a:pPr algn="ctr"/>
+            <a:fld id="{6E17BB72-A4A7-42B9-A58C-A071B0B9B6DD}" type="slidenum">
+              <a:rPr lang="en-US" sz="1400" smtClean="0">
+                <a:solidFill>
+                  <a:srgbClr val="FFFFFF"/>
+                </a:solidFill>
+                <a:latin typeface="Arial" panose="020B0604020202020204" pitchFamily="34" charset="0"/>
+              </a:rPr>
+              <a:pPr algn="ctr"/>
+              <a:t>20</a:t>
+            </a:fld>
+            <a:endParaRPr lang="en-US" sz="1400">
+              <a:solidFill>
+                <a:srgbClr val="FFFFFF"/>
+              </a:solidFill>
+              <a:latin typeface="Arial" panose="020B0604020202020204" pitchFamily="34" charset="0"/>
+            </a:endParaRPr>
           </a:p>
         </p:txBody>
       </p:sp>
@@ -19826,6 +20450,54 @@
           </a:p>
         </p:txBody>
       </p:sp>
+      <p:sp>
+        <p:nvSpPr>
+          <p:cNvPr id="3" name="AutoPageNum">
+            <a:extLst>
+              <a:ext uri="{FF2B5EF4-FFF2-40B4-BE49-F238E27FC236}">
+                <a16:creationId xmlns:a16="http://schemas.microsoft.com/office/drawing/2014/main" id="{CDC418F0-F112-A1D1-319A-387627684C68}"/>
+              </a:ext>
+            </a:extLst>
+          </p:cNvPr>
+          <p:cNvSpPr txBox="1"/>
+          <p:nvPr/>
+        </p:nvSpPr>
+        <p:spPr>
+          <a:xfrm>
+            <a:off x="11633200" y="6451600"/>
+            <a:ext cx="508000" cy="304800"/>
+          </a:xfrm>
+          <a:prstGeom prst="rect">
+            <a:avLst/>
+          </a:prstGeom>
+          <a:noFill/>
+        </p:spPr>
+        <p:txBody>
+          <a:bodyPr vert="horz" wrap="square" lIns="0" tIns="0" rIns="0" bIns="0" rtlCol="0">
+            <a:noAutofit/>
+          </a:bodyPr>
+          <a:lstStyle/>
+          <a:p>
+            <a:pPr algn="ctr"/>
+            <a:fld id="{8F386EE1-B028-42B3-A27C-587F844D1203}" type="slidenum">
+              <a:rPr lang="en-US" sz="1400" smtClean="0">
+                <a:solidFill>
+                  <a:srgbClr val="000000"/>
+                </a:solidFill>
+                <a:latin typeface="Arial" panose="020B0604020202020204" pitchFamily="34" charset="0"/>
+              </a:rPr>
+              <a:pPr algn="ctr"/>
+              <a:t>21</a:t>
+            </a:fld>
+            <a:endParaRPr lang="en-US" sz="1400">
+              <a:solidFill>
+                <a:srgbClr val="000000"/>
+              </a:solidFill>
+              <a:latin typeface="Arial" panose="020B0604020202020204" pitchFamily="34" charset="0"/>
+            </a:endParaRPr>
+          </a:p>
+        </p:txBody>
+      </p:sp>
     </p:spTree>
     <p:extLst>
       <p:ext uri="{BB962C8B-B14F-4D97-AF65-F5344CB8AC3E}">
@@ -23719,6 +24391,54 @@
           </a:xfrm>
         </p:grpSpPr>
       </p:grpSp>
+      <p:sp>
+        <p:nvSpPr>
+          <p:cNvPr id="6" name="AutoPageNum">
+            <a:extLst>
+              <a:ext uri="{FF2B5EF4-FFF2-40B4-BE49-F238E27FC236}">
+                <a16:creationId xmlns:a16="http://schemas.microsoft.com/office/drawing/2014/main" id="{3E1B216B-8D91-15F2-A96B-F096DBFBE1F6}"/>
+              </a:ext>
+            </a:extLst>
+          </p:cNvPr>
+          <p:cNvSpPr txBox="1"/>
+          <p:nvPr/>
+        </p:nvSpPr>
+        <p:spPr>
+          <a:xfrm>
+            <a:off x="11633200" y="6451600"/>
+            <a:ext cx="508000" cy="304800"/>
+          </a:xfrm>
+          <a:prstGeom prst="rect">
+            <a:avLst/>
+          </a:prstGeom>
+          <a:noFill/>
+        </p:spPr>
+        <p:txBody>
+          <a:bodyPr vert="horz" wrap="square" lIns="0" tIns="0" rIns="0" bIns="0" rtlCol="0">
+            <a:noAutofit/>
+          </a:bodyPr>
+          <a:lstStyle/>
+          <a:p>
+            <a:pPr algn="ctr"/>
+            <a:fld id="{49368D01-F561-4541-B4C3-A403BD462A48}" type="slidenum">
+              <a:rPr lang="en-US" sz="1400" smtClean="0">
+                <a:solidFill>
+                  <a:srgbClr val="FFFFFF"/>
+                </a:solidFill>
+                <a:latin typeface="Arial" panose="020B0604020202020204" pitchFamily="34" charset="0"/>
+              </a:rPr>
+              <a:pPr algn="ctr"/>
+              <a:t>22</a:t>
+            </a:fld>
+            <a:endParaRPr lang="en-US" sz="1400">
+              <a:solidFill>
+                <a:srgbClr val="FFFFFF"/>
+              </a:solidFill>
+              <a:latin typeface="Arial" panose="020B0604020202020204" pitchFamily="34" charset="0"/>
+            </a:endParaRPr>
+          </a:p>
+        </p:txBody>
+      </p:sp>
     </p:spTree>
     <p:extLst>
       <p:ext uri="{BB962C8B-B14F-4D97-AF65-F5344CB8AC3E}">
@@ -26248,6 +26968,54 @@
           </a:p>
         </p:txBody>
       </p:sp>
+      <p:sp>
+        <p:nvSpPr>
+          <p:cNvPr id="2" name="AutoPageNum">
+            <a:extLst>
+              <a:ext uri="{FF2B5EF4-FFF2-40B4-BE49-F238E27FC236}">
+                <a16:creationId xmlns:a16="http://schemas.microsoft.com/office/drawing/2014/main" id="{DCD77535-A95F-9DA3-09B2-5AB8B888AED5}"/>
+              </a:ext>
+            </a:extLst>
+          </p:cNvPr>
+          <p:cNvSpPr txBox="1"/>
+          <p:nvPr/>
+        </p:nvSpPr>
+        <p:spPr>
+          <a:xfrm>
+            <a:off x="11633200" y="6451600"/>
+            <a:ext cx="508000" cy="304800"/>
+          </a:xfrm>
+          <a:prstGeom prst="rect">
+            <a:avLst/>
+          </a:prstGeom>
+          <a:noFill/>
+        </p:spPr>
+        <p:txBody>
+          <a:bodyPr vert="horz" wrap="square" lIns="0" tIns="0" rIns="0" bIns="0" rtlCol="0">
+            <a:noAutofit/>
+          </a:bodyPr>
+          <a:lstStyle/>
+          <a:p>
+            <a:pPr algn="ctr"/>
+            <a:fld id="{AADC61E7-74F9-4C2D-A995-6377874F485F}" type="slidenum">
+              <a:rPr lang="en-US" sz="1400" smtClean="0">
+                <a:solidFill>
+                  <a:srgbClr val="000000"/>
+                </a:solidFill>
+                <a:latin typeface="Arial" panose="020B0604020202020204" pitchFamily="34" charset="0"/>
+              </a:rPr>
+              <a:pPr algn="ctr"/>
+              <a:t>23</a:t>
+            </a:fld>
+            <a:endParaRPr lang="en-US" sz="1400">
+              <a:solidFill>
+                <a:srgbClr val="000000"/>
+              </a:solidFill>
+              <a:latin typeface="Arial" panose="020B0604020202020204" pitchFamily="34" charset="0"/>
+            </a:endParaRPr>
+          </a:p>
+        </p:txBody>
+      </p:sp>
     </p:spTree>
   </p:cSld>
   <p:clrMapOvr>
@@ -27337,6 +28105,54 @@
           </a:p>
         </p:txBody>
       </p:sp>
+      <p:sp>
+        <p:nvSpPr>
+          <p:cNvPr id="3" name="AutoPageNum">
+            <a:extLst>
+              <a:ext uri="{FF2B5EF4-FFF2-40B4-BE49-F238E27FC236}">
+                <a16:creationId xmlns:a16="http://schemas.microsoft.com/office/drawing/2014/main" id="{1339CEA0-45BA-159D-83FF-08762C55F6AF}"/>
+              </a:ext>
+            </a:extLst>
+          </p:cNvPr>
+          <p:cNvSpPr txBox="1"/>
+          <p:nvPr/>
+        </p:nvSpPr>
+        <p:spPr>
+          <a:xfrm>
+            <a:off x="11633200" y="6451600"/>
+            <a:ext cx="508000" cy="304800"/>
+          </a:xfrm>
+          <a:prstGeom prst="rect">
+            <a:avLst/>
+          </a:prstGeom>
+          <a:noFill/>
+        </p:spPr>
+        <p:txBody>
+          <a:bodyPr vert="horz" wrap="square" lIns="0" tIns="0" rIns="0" bIns="0" rtlCol="0">
+            <a:noAutofit/>
+          </a:bodyPr>
+          <a:lstStyle/>
+          <a:p>
+            <a:pPr algn="ctr"/>
+            <a:fld id="{3260D315-47DF-4073-80D2-F64D8101E0A9}" type="slidenum">
+              <a:rPr lang="en-US" sz="1400" smtClean="0">
+                <a:solidFill>
+                  <a:srgbClr val="FFFFFF"/>
+                </a:solidFill>
+                <a:latin typeface="Arial" panose="020B0604020202020204" pitchFamily="34" charset="0"/>
+              </a:rPr>
+              <a:pPr algn="ctr"/>
+              <a:t>24</a:t>
+            </a:fld>
+            <a:endParaRPr lang="en-US" sz="1400">
+              <a:solidFill>
+                <a:srgbClr val="FFFFFF"/>
+              </a:solidFill>
+              <a:latin typeface="Arial" panose="020B0604020202020204" pitchFamily="34" charset="0"/>
+            </a:endParaRPr>
+          </a:p>
+        </p:txBody>
+      </p:sp>
     </p:spTree>
     <p:extLst>
       <p:ext uri="{BB962C8B-B14F-4D97-AF65-F5344CB8AC3E}">
@@ -27405,6 +28221,54 @@
               <a:rPr lang="en-US" dirty="0"/>
               <a:t>Operating Cycle and Revenue Recognition Criteria</a:t>
             </a:r>
+          </a:p>
+        </p:txBody>
+      </p:sp>
+      <p:sp>
+        <p:nvSpPr>
+          <p:cNvPr id="3" name="AutoPageNum">
+            <a:extLst>
+              <a:ext uri="{FF2B5EF4-FFF2-40B4-BE49-F238E27FC236}">
+                <a16:creationId xmlns:a16="http://schemas.microsoft.com/office/drawing/2014/main" id="{44FCB42C-BCBA-C58B-B44A-35143B5D68D8}"/>
+              </a:ext>
+            </a:extLst>
+          </p:cNvPr>
+          <p:cNvSpPr txBox="1"/>
+          <p:nvPr/>
+        </p:nvSpPr>
+        <p:spPr>
+          <a:xfrm>
+            <a:off x="11633200" y="6451600"/>
+            <a:ext cx="508000" cy="304800"/>
+          </a:xfrm>
+          <a:prstGeom prst="rect">
+            <a:avLst/>
+          </a:prstGeom>
+          <a:noFill/>
+        </p:spPr>
+        <p:txBody>
+          <a:bodyPr vert="horz" wrap="square" lIns="0" tIns="0" rIns="0" bIns="0" rtlCol="0">
+            <a:noAutofit/>
+          </a:bodyPr>
+          <a:lstStyle/>
+          <a:p>
+            <a:pPr algn="ctr"/>
+            <a:fld id="{992C867A-F0F0-4AE2-8A72-A68B3CB31957}" type="slidenum">
+              <a:rPr lang="en-US" sz="1400" smtClean="0">
+                <a:solidFill>
+                  <a:srgbClr val="000000"/>
+                </a:solidFill>
+                <a:latin typeface="Arial" panose="020B0604020202020204" pitchFamily="34" charset="0"/>
+              </a:rPr>
+              <a:pPr algn="ctr"/>
+              <a:t>3</a:t>
+            </a:fld>
+            <a:endParaRPr lang="en-US" sz="1400">
+              <a:solidFill>
+                <a:srgbClr val="000000"/>
+              </a:solidFill>
+              <a:latin typeface="Arial" panose="020B0604020202020204" pitchFamily="34" charset="0"/>
+            </a:endParaRPr>
           </a:p>
         </p:txBody>
       </p:sp>
@@ -29321,6 +30185,54 @@
               <a:latin typeface="Arial" pitchFamily="34" charset="0"/>
               <a:ea typeface="Arial" pitchFamily="34" charset="-122"/>
               <a:cs typeface="Arial" pitchFamily="34" charset="-120"/>
+            </a:endParaRPr>
+          </a:p>
+        </p:txBody>
+      </p:sp>
+      <p:sp>
+        <p:nvSpPr>
+          <p:cNvPr id="5" name="AutoPageNum">
+            <a:extLst>
+              <a:ext uri="{FF2B5EF4-FFF2-40B4-BE49-F238E27FC236}">
+                <a16:creationId xmlns:a16="http://schemas.microsoft.com/office/drawing/2014/main" id="{40CD11E9-1794-0572-1326-5C76BD3584C0}"/>
+              </a:ext>
+            </a:extLst>
+          </p:cNvPr>
+          <p:cNvSpPr txBox="1"/>
+          <p:nvPr/>
+        </p:nvSpPr>
+        <p:spPr>
+          <a:xfrm>
+            <a:off x="11633200" y="6451600"/>
+            <a:ext cx="508000" cy="304800"/>
+          </a:xfrm>
+          <a:prstGeom prst="rect">
+            <a:avLst/>
+          </a:prstGeom>
+          <a:noFill/>
+        </p:spPr>
+        <p:txBody>
+          <a:bodyPr vert="horz" wrap="square" lIns="0" tIns="0" rIns="0" bIns="0" rtlCol="0">
+            <a:noAutofit/>
+          </a:bodyPr>
+          <a:lstStyle/>
+          <a:p>
+            <a:pPr algn="ctr"/>
+            <a:fld id="{C3178A2D-DB51-4111-99C1-88984B43D046}" type="slidenum">
+              <a:rPr lang="en-US" sz="1400" smtClean="0">
+                <a:solidFill>
+                  <a:srgbClr val="FFFFFF"/>
+                </a:solidFill>
+                <a:latin typeface="Arial" panose="020B0604020202020204" pitchFamily="34" charset="0"/>
+              </a:rPr>
+              <a:pPr algn="ctr"/>
+              <a:t>4</a:t>
+            </a:fld>
+            <a:endParaRPr lang="en-US" sz="1400">
+              <a:solidFill>
+                <a:srgbClr val="FFFFFF"/>
+              </a:solidFill>
+              <a:latin typeface="Arial" panose="020B0604020202020204" pitchFamily="34" charset="0"/>
             </a:endParaRPr>
           </a:p>
         </p:txBody>
@@ -31552,6 +32464,54 @@
           </a:p>
         </p:txBody>
       </p:sp>
+      <p:sp>
+        <p:nvSpPr>
+          <p:cNvPr id="5" name="AutoPageNum">
+            <a:extLst>
+              <a:ext uri="{FF2B5EF4-FFF2-40B4-BE49-F238E27FC236}">
+                <a16:creationId xmlns:a16="http://schemas.microsoft.com/office/drawing/2014/main" id="{17CA21F2-C257-C2A1-E293-6891EBDAA0DC}"/>
+              </a:ext>
+            </a:extLst>
+          </p:cNvPr>
+          <p:cNvSpPr txBox="1"/>
+          <p:nvPr/>
+        </p:nvSpPr>
+        <p:spPr>
+          <a:xfrm>
+            <a:off x="11633200" y="6451600"/>
+            <a:ext cx="508000" cy="304800"/>
+          </a:xfrm>
+          <a:prstGeom prst="rect">
+            <a:avLst/>
+          </a:prstGeom>
+          <a:noFill/>
+        </p:spPr>
+        <p:txBody>
+          <a:bodyPr vert="horz" wrap="square" lIns="0" tIns="0" rIns="0" bIns="0" rtlCol="0">
+            <a:noAutofit/>
+          </a:bodyPr>
+          <a:lstStyle/>
+          <a:p>
+            <a:pPr algn="ctr"/>
+            <a:fld id="{DBFD988E-B59C-421E-A7F2-7326517FB945}" type="slidenum">
+              <a:rPr lang="en-US" sz="1400" smtClean="0">
+                <a:solidFill>
+                  <a:srgbClr val="FFFFFF"/>
+                </a:solidFill>
+                <a:latin typeface="Arial" panose="020B0604020202020204" pitchFamily="34" charset="0"/>
+              </a:rPr>
+              <a:pPr algn="ctr"/>
+              <a:t>5</a:t>
+            </a:fld>
+            <a:endParaRPr lang="en-US" sz="1400">
+              <a:solidFill>
+                <a:srgbClr val="FFFFFF"/>
+              </a:solidFill>
+              <a:latin typeface="Arial" panose="020B0604020202020204" pitchFamily="34" charset="0"/>
+            </a:endParaRPr>
+          </a:p>
+        </p:txBody>
+      </p:sp>
     </p:spTree>
     <p:extLst>
       <p:ext uri="{BB962C8B-B14F-4D97-AF65-F5344CB8AC3E}">
@@ -34455,6 +35415,54 @@
           </p:sp>
         </p:grpSp>
       </p:grpSp>
+      <p:sp>
+        <p:nvSpPr>
+          <p:cNvPr id="7" name="AutoPageNum">
+            <a:extLst>
+              <a:ext uri="{FF2B5EF4-FFF2-40B4-BE49-F238E27FC236}">
+                <a16:creationId xmlns:a16="http://schemas.microsoft.com/office/drawing/2014/main" id="{1A8637AC-A278-7EAD-B983-C4994AE2103A}"/>
+              </a:ext>
+            </a:extLst>
+          </p:cNvPr>
+          <p:cNvSpPr txBox="1"/>
+          <p:nvPr/>
+        </p:nvSpPr>
+        <p:spPr>
+          <a:xfrm>
+            <a:off x="11633200" y="6451600"/>
+            <a:ext cx="508000" cy="304800"/>
+          </a:xfrm>
+          <a:prstGeom prst="rect">
+            <a:avLst/>
+          </a:prstGeom>
+          <a:noFill/>
+        </p:spPr>
+        <p:txBody>
+          <a:bodyPr vert="horz" wrap="square" lIns="0" tIns="0" rIns="0" bIns="0" rtlCol="0">
+            <a:noAutofit/>
+          </a:bodyPr>
+          <a:lstStyle/>
+          <a:p>
+            <a:pPr algn="ctr"/>
+            <a:fld id="{204D660C-1CB7-4DEE-896A-7A4EBD6DA0B2}" type="slidenum">
+              <a:rPr lang="en-US" sz="1400" smtClean="0">
+                <a:solidFill>
+                  <a:srgbClr val="FFFFFF"/>
+                </a:solidFill>
+                <a:latin typeface="Arial" panose="020B0604020202020204" pitchFamily="34" charset="0"/>
+              </a:rPr>
+              <a:pPr algn="ctr"/>
+              <a:t>6</a:t>
+            </a:fld>
+            <a:endParaRPr lang="en-US" sz="1400">
+              <a:solidFill>
+                <a:srgbClr val="FFFFFF"/>
+              </a:solidFill>
+              <a:latin typeface="Arial" panose="020B0604020202020204" pitchFamily="34" charset="0"/>
+            </a:endParaRPr>
+          </a:p>
+        </p:txBody>
+      </p:sp>
     </p:spTree>
     <p:extLst>
       <p:ext uri="{BB962C8B-B14F-4D97-AF65-F5344CB8AC3E}">
@@ -35448,6 +36456,54 @@
           </a:p>
         </p:txBody>
       </p:sp>
+      <p:sp>
+        <p:nvSpPr>
+          <p:cNvPr id="3" name="AutoPageNum">
+            <a:extLst>
+              <a:ext uri="{FF2B5EF4-FFF2-40B4-BE49-F238E27FC236}">
+                <a16:creationId xmlns:a16="http://schemas.microsoft.com/office/drawing/2014/main" id="{3BEB5052-18F0-5A91-0FE8-19EFFEA66621}"/>
+              </a:ext>
+            </a:extLst>
+          </p:cNvPr>
+          <p:cNvSpPr txBox="1"/>
+          <p:nvPr/>
+        </p:nvSpPr>
+        <p:spPr>
+          <a:xfrm>
+            <a:off x="11633200" y="6451600"/>
+            <a:ext cx="508000" cy="304800"/>
+          </a:xfrm>
+          <a:prstGeom prst="rect">
+            <a:avLst/>
+          </a:prstGeom>
+          <a:noFill/>
+        </p:spPr>
+        <p:txBody>
+          <a:bodyPr vert="horz" wrap="square" lIns="0" tIns="0" rIns="0" bIns="0" rtlCol="0">
+            <a:noAutofit/>
+          </a:bodyPr>
+          <a:lstStyle/>
+          <a:p>
+            <a:pPr algn="ctr"/>
+            <a:fld id="{84243E7F-8297-4A62-ADF2-A7523D9BC342}" type="slidenum">
+              <a:rPr lang="en-US" sz="1400" smtClean="0">
+                <a:solidFill>
+                  <a:srgbClr val="000000"/>
+                </a:solidFill>
+                <a:latin typeface="Arial" panose="020B0604020202020204" pitchFamily="34" charset="0"/>
+              </a:rPr>
+              <a:pPr algn="ctr"/>
+              <a:t>7</a:t>
+            </a:fld>
+            <a:endParaRPr lang="en-US" sz="1400">
+              <a:solidFill>
+                <a:srgbClr val="000000"/>
+              </a:solidFill>
+              <a:latin typeface="Arial" panose="020B0604020202020204" pitchFamily="34" charset="0"/>
+            </a:endParaRPr>
+          </a:p>
+        </p:txBody>
+      </p:sp>
     </p:spTree>
     <p:extLst>
       <p:ext uri="{BB962C8B-B14F-4D97-AF65-F5344CB8AC3E}">
@@ -35928,6 +36984,54 @@
               </a:tabLst>
             </a:pPr>
             <a:endParaRPr lang="en-US" sz="2000" dirty="0"/>
+          </a:p>
+        </p:txBody>
+      </p:sp>
+      <p:sp>
+        <p:nvSpPr>
+          <p:cNvPr id="10" name="AutoPageNum">
+            <a:extLst>
+              <a:ext uri="{FF2B5EF4-FFF2-40B4-BE49-F238E27FC236}">
+                <a16:creationId xmlns:a16="http://schemas.microsoft.com/office/drawing/2014/main" id="{E8530D1F-E85F-D985-A333-04E52F821EB0}"/>
+              </a:ext>
+            </a:extLst>
+          </p:cNvPr>
+          <p:cNvSpPr txBox="1"/>
+          <p:nvPr/>
+        </p:nvSpPr>
+        <p:spPr>
+          <a:xfrm>
+            <a:off x="11633200" y="6451600"/>
+            <a:ext cx="508000" cy="304800"/>
+          </a:xfrm>
+          <a:prstGeom prst="rect">
+            <a:avLst/>
+          </a:prstGeom>
+          <a:noFill/>
+        </p:spPr>
+        <p:txBody>
+          <a:bodyPr vert="horz" wrap="square" lIns="0" tIns="0" rIns="0" bIns="0" rtlCol="0">
+            <a:noAutofit/>
+          </a:bodyPr>
+          <a:lstStyle/>
+          <a:p>
+            <a:pPr algn="ctr"/>
+            <a:fld id="{1491F128-E038-4E4E-81CA-D7711067AEFB}" type="slidenum">
+              <a:rPr lang="en-US" sz="1400" smtClean="0">
+                <a:solidFill>
+                  <a:srgbClr val="FFFFFF"/>
+                </a:solidFill>
+                <a:latin typeface="Arial" panose="020B0604020202020204" pitchFamily="34" charset="0"/>
+              </a:rPr>
+              <a:pPr algn="ctr"/>
+              <a:t>8</a:t>
+            </a:fld>
+            <a:endParaRPr lang="en-US" sz="1400">
+              <a:solidFill>
+                <a:srgbClr val="FFFFFF"/>
+              </a:solidFill>
+              <a:latin typeface="Arial" panose="020B0604020202020204" pitchFamily="34" charset="0"/>
+            </a:endParaRPr>
           </a:p>
         </p:txBody>
       </p:sp>
@@ -37332,6 +38436,54 @@
           </a:fontRef>
         </p:style>
       </p:cxnSp>
+      <p:sp>
+        <p:nvSpPr>
+          <p:cNvPr id="3" name="AutoPageNum">
+            <a:extLst>
+              <a:ext uri="{FF2B5EF4-FFF2-40B4-BE49-F238E27FC236}">
+                <a16:creationId xmlns:a16="http://schemas.microsoft.com/office/drawing/2014/main" id="{4645DEA9-116D-4A53-0819-2E5CDBE51F32}"/>
+              </a:ext>
+            </a:extLst>
+          </p:cNvPr>
+          <p:cNvSpPr txBox="1"/>
+          <p:nvPr/>
+        </p:nvSpPr>
+        <p:spPr>
+          <a:xfrm>
+            <a:off x="11633200" y="6451600"/>
+            <a:ext cx="508000" cy="304800"/>
+          </a:xfrm>
+          <a:prstGeom prst="rect">
+            <a:avLst/>
+          </a:prstGeom>
+          <a:noFill/>
+        </p:spPr>
+        <p:txBody>
+          <a:bodyPr vert="horz" wrap="square" lIns="0" tIns="0" rIns="0" bIns="0" rtlCol="0">
+            <a:noAutofit/>
+          </a:bodyPr>
+          <a:lstStyle/>
+          <a:p>
+            <a:pPr algn="ctr"/>
+            <a:fld id="{ECC980C4-1AE8-4B35-89B5-F8B71EE835BD}" type="slidenum">
+              <a:rPr lang="en-US" sz="1400" smtClean="0">
+                <a:solidFill>
+                  <a:srgbClr val="FFFFFF"/>
+                </a:solidFill>
+                <a:latin typeface="Arial" panose="020B0604020202020204" pitchFamily="34" charset="0"/>
+              </a:rPr>
+              <a:pPr algn="ctr"/>
+              <a:t>9</a:t>
+            </a:fld>
+            <a:endParaRPr lang="en-US" sz="1400">
+              <a:solidFill>
+                <a:srgbClr val="FFFFFF"/>
+              </a:solidFill>
+              <a:latin typeface="Arial" panose="020B0604020202020204" pitchFamily="34" charset="0"/>
+            </a:endParaRPr>
+          </a:p>
+        </p:txBody>
+      </p:sp>
     </p:spTree>
     <p:extLst>
       <p:ext uri="{BB962C8B-B14F-4D97-AF65-F5344CB8AC3E}">
